--- a/media/resources/files/Onduktardyn_Orunduk_Maanisi_KondumA_Hq91A1e.pptx
+++ b/media/resources/files/Onduktardyn_Orunduk_Maanisi_KondumA_Hq91A1e.pptx
@@ -17535,7 +17535,7 @@
                 <a:ea typeface="+mn-ea"/>
                 <a:cs typeface="+mn-cs"/>
               </a:rPr>
-              <a:t>Турдуу пикирлер учун ыраазычылык билдиребиз.</a:t>
+              <a:t>Түрдүү пикирлер үчүн ыраазычылык билдиребиз.</a:t>
             </a:r>
           </a:p>
           <a:p>

--- a/media/resources/files/Onduktardyn_Orunduk_Maanisi_KondumA_Hq91A1e.pptx
+++ b/media/resources/files/Onduktardyn_Orunduk_Maanisi_KondumA_Hq91A1e.pptx
@@ -1857,7 +1857,7 @@
             <a:pPr algn="r"/>
             <a:r>
               <a:rPr lang="en-GB" sz="1200" dirty="0"/>
-              <a:t>0.5</a:t>
+              <a:t>0,5</a:t>
             </a:r>
           </a:p>
         </p:txBody>
@@ -1892,7 +1892,7 @@
           <a:p>
             <a:r>
               <a:rPr lang="en-GB" sz="1200" dirty="0"/>
-              <a:t>0.2</a:t>
+              <a:t>0,2</a:t>
             </a:r>
           </a:p>
         </p:txBody>
@@ -2070,7 +2070,7 @@
             <a:pPr algn="r"/>
             <a:r>
               <a:rPr lang="en-GB" sz="1200" dirty="0"/>
-              <a:t>0.8</a:t>
+              <a:t>0,8</a:t>
             </a:r>
           </a:p>
         </p:txBody>
@@ -2105,7 +2105,7 @@
           <a:p>
             <a:r>
               <a:rPr lang="en-GB" sz="1200" dirty="0"/>
-              <a:t>0.7</a:t>
+              <a:t>0,7</a:t>
             </a:r>
           </a:p>
         </p:txBody>
@@ -2242,7 +2242,7 @@
             <a:pPr algn="r"/>
             <a:r>
               <a:rPr lang="en-GB" sz="1200" dirty="0"/>
-              <a:t>4.2</a:t>
+              <a:t>4,2</a:t>
             </a:r>
           </a:p>
         </p:txBody>
@@ -2277,7 +2277,7 @@
           <a:p>
             <a:r>
               <a:rPr lang="en-GB" sz="1200" dirty="0"/>
-              <a:t>3.9</a:t>
+              <a:t>3,9</a:t>
             </a:r>
           </a:p>
         </p:txBody>
@@ -2414,7 +2414,7 @@
             <a:pPr algn="r"/>
             <a:r>
               <a:rPr lang="en-GB" sz="1200" dirty="0"/>
-              <a:t>0.7</a:t>
+              <a:t>0,7</a:t>
             </a:r>
           </a:p>
         </p:txBody>
@@ -2449,7 +2449,7 @@
           <a:p>
             <a:r>
               <a:rPr lang="en-GB" sz="1200" dirty="0"/>
-              <a:t>0.9</a:t>
+              <a:t>0,9</a:t>
             </a:r>
           </a:p>
         </p:txBody>
@@ -2586,7 +2586,7 @@
             <a:pPr algn="r"/>
             <a:r>
               <a:rPr lang="en-GB" sz="1200" dirty="0"/>
-              <a:t>0.09</a:t>
+              <a:t>0,09</a:t>
             </a:r>
           </a:p>
         </p:txBody>
@@ -2621,7 +2621,7 @@
           <a:p>
             <a:r>
               <a:rPr lang="en-GB" sz="1200" dirty="0"/>
-              <a:t>0.6</a:t>
+              <a:t>0,6</a:t>
             </a:r>
           </a:p>
         </p:txBody>
@@ -2758,7 +2758,7 @@
             <a:pPr algn="r"/>
             <a:r>
               <a:rPr lang="en-GB" sz="1200" dirty="0"/>
-              <a:t>0.7</a:t>
+              <a:t>0,7</a:t>
             </a:r>
           </a:p>
         </p:txBody>
@@ -2793,7 +2793,7 @@
           <a:p>
             <a:r>
               <a:rPr lang="en-GB" sz="1200" dirty="0"/>
-              <a:t>0.49</a:t>
+              <a:t>0,49</a:t>
             </a:r>
           </a:p>
         </p:txBody>
@@ -2930,7 +2930,7 @@
             <a:pPr algn="r"/>
             <a:r>
               <a:rPr lang="en-GB" sz="1200" dirty="0"/>
-              <a:t>0.6</a:t>
+              <a:t>0,6</a:t>
             </a:r>
           </a:p>
         </p:txBody>
@@ -2965,7 +2965,7 @@
           <a:p>
             <a:r>
               <a:rPr lang="en-GB" sz="1200" dirty="0"/>
-              <a:t>0.71</a:t>
+              <a:t>0,71</a:t>
             </a:r>
           </a:p>
         </p:txBody>
@@ -3102,7 +3102,7 @@
             <a:pPr algn="r"/>
             <a:r>
               <a:rPr lang="en-GB" sz="1200" dirty="0"/>
-              <a:t>0.59</a:t>
+              <a:t>0,59</a:t>
             </a:r>
           </a:p>
         </p:txBody>
@@ -3137,7 +3137,7 @@
           <a:p>
             <a:r>
               <a:rPr lang="en-GB" sz="1200" dirty="0"/>
-              <a:t>0.6</a:t>
+              <a:t>0,6</a:t>
             </a:r>
           </a:p>
         </p:txBody>
@@ -3274,7 +3274,7 @@
             <a:pPr algn="r"/>
             <a:r>
               <a:rPr lang="en-GB" sz="1200" dirty="0"/>
-              <a:t>2.74</a:t>
+              <a:t>2,74</a:t>
             </a:r>
           </a:p>
         </p:txBody>
@@ -3309,7 +3309,7 @@
           <a:p>
             <a:r>
               <a:rPr lang="en-GB" sz="1200" dirty="0"/>
-              <a:t>2.47</a:t>
+              <a:t>2,47</a:t>
             </a:r>
           </a:p>
         </p:txBody>
@@ -3446,7 +3446,7 @@
             <a:pPr algn="r"/>
             <a:r>
               <a:rPr lang="en-GB" sz="1200" dirty="0"/>
-              <a:t>4.98</a:t>
+              <a:t>4,98</a:t>
             </a:r>
           </a:p>
         </p:txBody>
@@ -3481,7 +3481,7 @@
           <a:p>
             <a:r>
               <a:rPr lang="en-GB" sz="1200" dirty="0"/>
-              <a:t>5.01</a:t>
+              <a:t>5,01</a:t>
             </a:r>
           </a:p>
         </p:txBody>
@@ -3618,7 +3618,7 @@
             <a:pPr algn="r"/>
             <a:r>
               <a:rPr lang="en-GB" sz="1200" dirty="0"/>
-              <a:t>0.045</a:t>
+              <a:t>0,045</a:t>
             </a:r>
           </a:p>
         </p:txBody>
@@ -3653,7 +3653,7 @@
           <a:p>
             <a:r>
               <a:rPr lang="en-GB" sz="1200" dirty="0"/>
-              <a:t>0.201</a:t>
+              <a:t>0,201</a:t>
             </a:r>
           </a:p>
         </p:txBody>
@@ -3790,7 +3790,7 @@
             <a:pPr algn="r"/>
             <a:r>
               <a:rPr lang="en-GB" sz="1200" dirty="0"/>
-              <a:t>0.863</a:t>
+              <a:t>0,863</a:t>
             </a:r>
           </a:p>
         </p:txBody>
@@ -3825,7 +3825,7 @@
           <a:p>
             <a:r>
               <a:rPr lang="en-GB" sz="1200" dirty="0"/>
-              <a:t>0.86</a:t>
+              <a:t>0,86</a:t>
             </a:r>
           </a:p>
         </p:txBody>
@@ -3962,7 +3962,7 @@
             <a:pPr algn="r"/>
             <a:r>
               <a:rPr lang="en-GB" sz="1200" dirty="0"/>
-              <a:t>0.71</a:t>
+              <a:t>0,71</a:t>
             </a:r>
           </a:p>
         </p:txBody>
@@ -3997,7 +3997,7 @@
           <a:p>
             <a:r>
               <a:rPr lang="en-GB" sz="1200" dirty="0"/>
-              <a:t>0.708</a:t>
+              <a:t>0,708</a:t>
             </a:r>
           </a:p>
         </p:txBody>
@@ -4134,7 +4134,7 @@
             <a:pPr algn="r"/>
             <a:r>
               <a:rPr lang="en-GB" sz="1200" dirty="0"/>
-              <a:t>0.4</a:t>
+              <a:t>0,4</a:t>
             </a:r>
           </a:p>
         </p:txBody>
@@ -4169,7 +4169,7 @@
           <a:p>
             <a:r>
               <a:rPr lang="en-GB" sz="1200" dirty="0"/>
-              <a:t>0.411</a:t>
+              <a:t>0,411</a:t>
             </a:r>
           </a:p>
         </p:txBody>
@@ -4306,7 +4306,7 @@
             <a:pPr algn="r"/>
             <a:r>
               <a:rPr lang="en-GB" sz="1200" dirty="0"/>
-              <a:t>0.805</a:t>
+              <a:t>0,805</a:t>
             </a:r>
           </a:p>
         </p:txBody>
@@ -4341,7 +4341,7 @@
           <a:p>
             <a:r>
               <a:rPr lang="en-GB" sz="1200" dirty="0"/>
-              <a:t>0.81</a:t>
+              <a:t>0,81</a:t>
             </a:r>
           </a:p>
         </p:txBody>
@@ -4478,7 +4478,7 @@
             <a:pPr algn="r"/>
             <a:r>
               <a:rPr lang="en-GB" sz="1200" dirty="0"/>
-              <a:t>0.065</a:t>
+              <a:t>0,065</a:t>
             </a:r>
           </a:p>
         </p:txBody>
@@ -4513,7 +4513,7 @@
           <a:p>
             <a:r>
               <a:rPr lang="en-GB" sz="1200" dirty="0"/>
-              <a:t>0.07</a:t>
+              <a:t>0,07</a:t>
             </a:r>
           </a:p>
         </p:txBody>
@@ -4649,7 +4649,7 @@
           <a:p>
             <a:r>
               <a:rPr lang="en-GB" sz="1200" dirty="0"/>
-              <a:t>0.261, 0.612, 0.216</a:t>
+              <a:t>0,261, 0,612, 0,216</a:t>
             </a:r>
           </a:p>
         </p:txBody>
@@ -4885,7 +4885,7 @@
           <a:p>
             <a:r>
               <a:rPr lang="en-GB" sz="1200" dirty="0"/>
-              <a:t>0.35, 0.503, 0.305, 0.053</a:t>
+              <a:t>0,35, 0,503, 0,305, 0,053</a:t>
             </a:r>
           </a:p>
         </p:txBody>
@@ -4960,7 +4960,7 @@
           <a:p>
             <a:r>
               <a:rPr lang="en-GB" sz="1200" dirty="0"/>
-              <a:t>0.2105, 0.521, 0.25, 0.125, 0.215 </a:t>
+              <a:t>0,2105, 0,521, 0,25, 0,125, 0,215 </a:t>
             </a:r>
           </a:p>
         </p:txBody>
@@ -5083,7 +5083,7 @@
             </a:r>
             <a:r>
               <a:rPr lang="en-GB" sz="1200" dirty="0"/>
-              <a:t>0.8</a:t>
+              <a:t>0,8</a:t>
             </a:r>
             <a:r>
               <a:rPr lang="ru-RU" sz="1200" dirty="0"/>
@@ -5091,7 +5091,7 @@
             </a:r>
             <a:r>
               <a:rPr lang="en-GB" sz="1200" dirty="0"/>
-              <a:t>0.482 </a:t>
+              <a:t>0,482 </a:t>
             </a:r>
             <a:r>
               <a:rPr lang="ru-RU" sz="1200" dirty="0"/>
@@ -5146,7 +5146,7 @@
             </a:r>
             <a:r>
               <a:rPr lang="en-GB" sz="1200" b="1" dirty="0"/>
-              <a:t>0.21</a:t>
+              <a:t>0,21</a:t>
             </a:r>
             <a:r>
               <a:rPr lang="ru-RU" sz="1200" b="1" dirty="0"/>
@@ -5154,7 +5154,7 @@
             </a:r>
             <a:r>
               <a:rPr lang="en-GB" sz="1200" b="1" dirty="0"/>
-              <a:t>0.459 </a:t>
+              <a:t>0,459 </a:t>
             </a:r>
             <a:r>
               <a:rPr lang="ru-RU" sz="1200" b="1" dirty="0"/>
@@ -6154,7 +6154,7 @@
                   <a:srgbClr val="0070C0"/>
                 </a:solidFill>
               </a:rPr>
-              <a:t>0.261, 0.612, 0.216</a:t>
+              <a:t>0,261, 0,612, 0,216</a:t>
             </a:r>
           </a:p>
         </p:txBody>
@@ -6193,7 +6193,7 @@
                   <a:srgbClr val="0070C0"/>
                 </a:solidFill>
               </a:rPr>
-              <a:t>0.053, 0.305, 0.35, 0.503</a:t>
+              <a:t>0,053, 0,305, 0,35, 0,503</a:t>
             </a:r>
           </a:p>
         </p:txBody>
@@ -6232,7 +6232,7 @@
                   <a:srgbClr val="0070C0"/>
                 </a:solidFill>
               </a:rPr>
-              <a:t>0.125, 0.2105, 0.215, 0.25, 0.521 </a:t>
+              <a:t>0,125, 0,2105, 0,215, 0,25, 0,521 </a:t>
             </a:r>
           </a:p>
         </p:txBody>
@@ -6271,7 +6271,7 @@
                   <a:srgbClr val="0070C0"/>
                 </a:solidFill>
               </a:rPr>
-              <a:t>0.48</a:t>
+              <a:t>0,48</a:t>
             </a:r>
           </a:p>
         </p:txBody>
@@ -6310,7 +6310,7 @@
                   <a:srgbClr val="0070C0"/>
                 </a:solidFill>
               </a:rPr>
-              <a:t>0.641</a:t>
+              <a:t>0,641</a:t>
             </a:r>
           </a:p>
         </p:txBody>
@@ -6349,7 +6349,7 @@
                   <a:srgbClr val="0070C0"/>
                 </a:solidFill>
               </a:rPr>
-              <a:t>0.293</a:t>
+              <a:t>0,293</a:t>
             </a:r>
           </a:p>
         </p:txBody>
@@ -6521,7 +6521,7 @@
             <a:pPr algn="r"/>
             <a:r>
               <a:rPr lang="en-GB" sz="1200" dirty="0"/>
-              <a:t>0.5</a:t>
+              <a:t>0,5</a:t>
             </a:r>
           </a:p>
         </p:txBody>
@@ -6556,7 +6556,7 @@
           <a:p>
             <a:r>
               <a:rPr lang="en-GB" sz="1200" dirty="0"/>
-              <a:t>0.2</a:t>
+              <a:t>0,2</a:t>
             </a:r>
           </a:p>
         </p:txBody>
@@ -6734,7 +6734,7 @@
             <a:pPr algn="r"/>
             <a:r>
               <a:rPr lang="en-GB" sz="1200" dirty="0"/>
-              <a:t>0.8</a:t>
+              <a:t>0,8</a:t>
             </a:r>
           </a:p>
         </p:txBody>
@@ -6769,7 +6769,7 @@
           <a:p>
             <a:r>
               <a:rPr lang="en-GB" sz="1200" dirty="0"/>
-              <a:t>0.7</a:t>
+              <a:t>0,7</a:t>
             </a:r>
           </a:p>
         </p:txBody>
@@ -6906,7 +6906,7 @@
             <a:pPr algn="r"/>
             <a:r>
               <a:rPr lang="en-GB" sz="1200" dirty="0"/>
-              <a:t>4.2</a:t>
+              <a:t>4,2</a:t>
             </a:r>
           </a:p>
         </p:txBody>
@@ -6941,7 +6941,7 @@
           <a:p>
             <a:r>
               <a:rPr lang="en-GB" sz="1200" dirty="0"/>
-              <a:t>3.9</a:t>
+              <a:t>3,9</a:t>
             </a:r>
           </a:p>
         </p:txBody>
@@ -7078,7 +7078,7 @@
             <a:pPr algn="r"/>
             <a:r>
               <a:rPr lang="en-GB" sz="1200" dirty="0"/>
-              <a:t>0.7</a:t>
+              <a:t>0,7</a:t>
             </a:r>
           </a:p>
         </p:txBody>
@@ -7113,7 +7113,7 @@
           <a:p>
             <a:r>
               <a:rPr lang="en-GB" sz="1200" dirty="0"/>
-              <a:t>0.9</a:t>
+              <a:t>0,9</a:t>
             </a:r>
           </a:p>
         </p:txBody>
@@ -7250,7 +7250,7 @@
             <a:pPr algn="r"/>
             <a:r>
               <a:rPr lang="en-GB" sz="1200" dirty="0"/>
-              <a:t>0.09</a:t>
+              <a:t>0,09</a:t>
             </a:r>
           </a:p>
         </p:txBody>
@@ -7285,7 +7285,7 @@
           <a:p>
             <a:r>
               <a:rPr lang="en-GB" sz="1200" dirty="0"/>
-              <a:t>0.6</a:t>
+              <a:t>0,6</a:t>
             </a:r>
           </a:p>
         </p:txBody>
@@ -7422,7 +7422,7 @@
             <a:pPr algn="r"/>
             <a:r>
               <a:rPr lang="en-GB" sz="1200" dirty="0"/>
-              <a:t>0.7</a:t>
+              <a:t>0,7</a:t>
             </a:r>
           </a:p>
         </p:txBody>
@@ -7457,7 +7457,7 @@
           <a:p>
             <a:r>
               <a:rPr lang="en-GB" sz="1200" dirty="0"/>
-              <a:t>0.49</a:t>
+              <a:t>0,49</a:t>
             </a:r>
           </a:p>
         </p:txBody>
@@ -7594,7 +7594,7 @@
             <a:pPr algn="r"/>
             <a:r>
               <a:rPr lang="en-GB" sz="1200" dirty="0"/>
-              <a:t>0.6</a:t>
+              <a:t>0,6</a:t>
             </a:r>
           </a:p>
         </p:txBody>
@@ -7629,7 +7629,7 @@
           <a:p>
             <a:r>
               <a:rPr lang="en-GB" sz="1200" dirty="0"/>
-              <a:t>0.71</a:t>
+              <a:t>0,71</a:t>
             </a:r>
           </a:p>
         </p:txBody>
@@ -7766,7 +7766,7 @@
             <a:pPr algn="r"/>
             <a:r>
               <a:rPr lang="en-GB" sz="1200" dirty="0"/>
-              <a:t>0.59</a:t>
+              <a:t>0,59</a:t>
             </a:r>
           </a:p>
         </p:txBody>
@@ -7801,7 +7801,7 @@
           <a:p>
             <a:r>
               <a:rPr lang="en-GB" sz="1200" dirty="0"/>
-              <a:t>0.6</a:t>
+              <a:t>0,6</a:t>
             </a:r>
           </a:p>
         </p:txBody>
@@ -7938,7 +7938,7 @@
             <a:pPr algn="r"/>
             <a:r>
               <a:rPr lang="en-GB" sz="1200" dirty="0"/>
-              <a:t>2.74</a:t>
+              <a:t>2,74</a:t>
             </a:r>
           </a:p>
         </p:txBody>
@@ -7973,7 +7973,7 @@
           <a:p>
             <a:r>
               <a:rPr lang="en-GB" sz="1200" dirty="0"/>
-              <a:t>2.47</a:t>
+              <a:t>2,47</a:t>
             </a:r>
           </a:p>
         </p:txBody>
@@ -8110,7 +8110,7 @@
             <a:pPr algn="r"/>
             <a:r>
               <a:rPr lang="en-GB" sz="1200" dirty="0"/>
-              <a:t>4.98</a:t>
+              <a:t>4,98</a:t>
             </a:r>
           </a:p>
         </p:txBody>
@@ -8145,7 +8145,7 @@
           <a:p>
             <a:r>
               <a:rPr lang="en-GB" sz="1200" dirty="0"/>
-              <a:t>5.01</a:t>
+              <a:t>5,01</a:t>
             </a:r>
           </a:p>
         </p:txBody>
@@ -8221,7 +8221,7 @@
             <a:pPr algn="r"/>
             <a:r>
               <a:rPr lang="en-GB" sz="1200" dirty="0"/>
-              <a:t>0.045</a:t>
+              <a:t>0,045</a:t>
             </a:r>
           </a:p>
         </p:txBody>
@@ -8256,7 +8256,7 @@
           <a:p>
             <a:r>
               <a:rPr lang="en-GB" sz="1200" dirty="0"/>
-              <a:t>0.201</a:t>
+              <a:t>0,201</a:t>
             </a:r>
           </a:p>
         </p:txBody>
@@ -8332,7 +8332,7 @@
             <a:pPr algn="r"/>
             <a:r>
               <a:rPr lang="en-GB" sz="1200" dirty="0"/>
-              <a:t>0.863</a:t>
+              <a:t>0,863</a:t>
             </a:r>
           </a:p>
         </p:txBody>
@@ -8367,7 +8367,7 @@
           <a:p>
             <a:r>
               <a:rPr lang="en-GB" sz="1200" dirty="0"/>
-              <a:t>0.86</a:t>
+              <a:t>0,86</a:t>
             </a:r>
           </a:p>
         </p:txBody>
@@ -8443,7 +8443,7 @@
             <a:pPr algn="r"/>
             <a:r>
               <a:rPr lang="en-GB" sz="1200" dirty="0"/>
-              <a:t>0.71</a:t>
+              <a:t>0,71</a:t>
             </a:r>
           </a:p>
         </p:txBody>
@@ -8478,7 +8478,7 @@
           <a:p>
             <a:r>
               <a:rPr lang="en-GB" sz="1200" dirty="0"/>
-              <a:t>0.708</a:t>
+              <a:t>0,708</a:t>
             </a:r>
           </a:p>
         </p:txBody>
@@ -8554,7 +8554,7 @@
             <a:pPr algn="r"/>
             <a:r>
               <a:rPr lang="en-GB" sz="1200" dirty="0"/>
-              <a:t>0.4</a:t>
+              <a:t>0,4</a:t>
             </a:r>
           </a:p>
         </p:txBody>
@@ -8589,7 +8589,7 @@
           <a:p>
             <a:r>
               <a:rPr lang="en-GB" sz="1200" dirty="0"/>
-              <a:t>0.411</a:t>
+              <a:t>0,411</a:t>
             </a:r>
           </a:p>
         </p:txBody>
@@ -8665,7 +8665,7 @@
             <a:pPr algn="r"/>
             <a:r>
               <a:rPr lang="en-GB" sz="1200" dirty="0"/>
-              <a:t>0.805</a:t>
+              <a:t>0,805</a:t>
             </a:r>
           </a:p>
         </p:txBody>
@@ -8700,7 +8700,7 @@
           <a:p>
             <a:r>
               <a:rPr lang="en-GB" sz="1200" dirty="0"/>
-              <a:t>0.81</a:t>
+              <a:t>0,81</a:t>
             </a:r>
           </a:p>
         </p:txBody>
@@ -8776,7 +8776,7 @@
             <a:pPr algn="r"/>
             <a:r>
               <a:rPr lang="en-GB" sz="1200" dirty="0"/>
-              <a:t>0.065</a:t>
+              <a:t>0,065</a:t>
             </a:r>
           </a:p>
         </p:txBody>
@@ -8811,7 +8811,7 @@
           <a:p>
             <a:r>
               <a:rPr lang="en-GB" sz="1200" dirty="0"/>
-              <a:t>0.07</a:t>
+              <a:t>0,07</a:t>
             </a:r>
           </a:p>
         </p:txBody>
@@ -8886,7 +8886,7 @@
           <a:p>
             <a:r>
               <a:rPr lang="en-GB" sz="1200" dirty="0"/>
-              <a:t>0.261, 0.612, 0.216</a:t>
+              <a:t>0,261, 0,612, 0,216</a:t>
             </a:r>
           </a:p>
         </p:txBody>
@@ -9122,7 +9122,7 @@
           <a:p>
             <a:r>
               <a:rPr lang="en-GB" sz="1200" dirty="0"/>
-              <a:t>0.35, 0.503, 0.305, 0.053</a:t>
+              <a:t>0,35, 0,503, 0,305, 0,053</a:t>
             </a:r>
           </a:p>
         </p:txBody>
@@ -9197,7 +9197,7 @@
           <a:p>
             <a:r>
               <a:rPr lang="en-GB" sz="1200" dirty="0"/>
-              <a:t>0.2105, 0.521, 0.25, 0.125, 0.215 </a:t>
+              <a:t>0,2105, 0,521, 0,25, 0,125, 0,215 </a:t>
             </a:r>
           </a:p>
         </p:txBody>
@@ -9320,7 +9320,7 @@
             </a:r>
             <a:r>
               <a:rPr lang="en-GB" sz="1200" dirty="0"/>
-              <a:t>0.8</a:t>
+              <a:t>0,8</a:t>
             </a:r>
             <a:r>
               <a:rPr lang="ru-RU" sz="1200" dirty="0"/>
@@ -9328,7 +9328,7 @@
             </a:r>
             <a:r>
               <a:rPr lang="en-GB" sz="1200" dirty="0"/>
-              <a:t>0.482 </a:t>
+              <a:t>0,482 </a:t>
             </a:r>
             <a:r>
               <a:rPr lang="ru-RU" sz="1200" dirty="0"/>
@@ -9383,7 +9383,7 @@
             </a:r>
             <a:r>
               <a:rPr lang="en-GB" sz="1200" b="1" dirty="0"/>
-              <a:t>0.21</a:t>
+              <a:t>0,21</a:t>
             </a:r>
             <a:r>
               <a:rPr lang="ru-RU" sz="1200" b="1" dirty="0"/>
@@ -9391,7 +9391,7 @@
             </a:r>
             <a:r>
               <a:rPr lang="en-GB" sz="1200" b="1" dirty="0"/>
-              <a:t>0.459 </a:t>
+              <a:t>0,459 </a:t>
             </a:r>
             <a:r>
               <a:rPr lang="ru-RU" sz="1200" b="1" dirty="0"/>
@@ -10020,7 +10020,7 @@
             <a:pPr algn="r"/>
             <a:r>
               <a:rPr lang="en-GB" sz="1200" dirty="0"/>
-              <a:t>0.5</a:t>
+              <a:t>0,5</a:t>
             </a:r>
           </a:p>
         </p:txBody>
@@ -10055,7 +10055,7 @@
           <a:p>
             <a:r>
               <a:rPr lang="en-GB" sz="1200" dirty="0"/>
-              <a:t>0.2</a:t>
+              <a:t>0,2</a:t>
             </a:r>
           </a:p>
         </p:txBody>
@@ -10233,7 +10233,7 @@
             <a:pPr algn="r"/>
             <a:r>
               <a:rPr lang="en-GB" sz="1200" dirty="0"/>
-              <a:t>0.8</a:t>
+              <a:t>0,8</a:t>
             </a:r>
           </a:p>
         </p:txBody>
@@ -10268,7 +10268,7 @@
           <a:p>
             <a:r>
               <a:rPr lang="en-GB" sz="1200" dirty="0"/>
-              <a:t>0.7</a:t>
+              <a:t>0,7</a:t>
             </a:r>
           </a:p>
         </p:txBody>
@@ -10405,7 +10405,7 @@
             <a:pPr algn="r"/>
             <a:r>
               <a:rPr lang="en-GB" sz="1200" dirty="0"/>
-              <a:t>4.2</a:t>
+              <a:t>4,2</a:t>
             </a:r>
           </a:p>
         </p:txBody>
@@ -10440,7 +10440,7 @@
           <a:p>
             <a:r>
               <a:rPr lang="en-GB" sz="1200" dirty="0"/>
-              <a:t>3.9</a:t>
+              <a:t>3,9</a:t>
             </a:r>
           </a:p>
         </p:txBody>
@@ -10577,7 +10577,7 @@
             <a:pPr algn="r"/>
             <a:r>
               <a:rPr lang="en-GB" sz="1200" dirty="0"/>
-              <a:t>0.7</a:t>
+              <a:t>0,7</a:t>
             </a:r>
           </a:p>
         </p:txBody>
@@ -10612,7 +10612,7 @@
           <a:p>
             <a:r>
               <a:rPr lang="en-GB" sz="1200" dirty="0"/>
-              <a:t>0.9</a:t>
+              <a:t>0,9</a:t>
             </a:r>
           </a:p>
         </p:txBody>
@@ -10749,7 +10749,7 @@
             <a:pPr algn="r"/>
             <a:r>
               <a:rPr lang="en-GB" sz="1200" dirty="0"/>
-              <a:t>0.09</a:t>
+              <a:t>0,09</a:t>
             </a:r>
           </a:p>
         </p:txBody>
@@ -10784,7 +10784,7 @@
           <a:p>
             <a:r>
               <a:rPr lang="en-GB" sz="1200" dirty="0"/>
-              <a:t>0.6</a:t>
+              <a:t>0,6</a:t>
             </a:r>
           </a:p>
         </p:txBody>
@@ -10921,7 +10921,7 @@
             <a:pPr algn="r"/>
             <a:r>
               <a:rPr lang="en-GB" sz="1200" dirty="0"/>
-              <a:t>0.7</a:t>
+              <a:t>0,7</a:t>
             </a:r>
           </a:p>
         </p:txBody>
@@ -10956,7 +10956,7 @@
           <a:p>
             <a:r>
               <a:rPr lang="en-GB" sz="1200" dirty="0"/>
-              <a:t>0.49</a:t>
+              <a:t>0,49</a:t>
             </a:r>
           </a:p>
         </p:txBody>
@@ -11093,7 +11093,7 @@
             <a:pPr algn="r"/>
             <a:r>
               <a:rPr lang="en-GB" sz="1200" dirty="0"/>
-              <a:t>0.6</a:t>
+              <a:t>0,6</a:t>
             </a:r>
           </a:p>
         </p:txBody>
@@ -11128,7 +11128,7 @@
           <a:p>
             <a:r>
               <a:rPr lang="en-GB" sz="1200" dirty="0"/>
-              <a:t>0.71</a:t>
+              <a:t>0,71</a:t>
             </a:r>
           </a:p>
         </p:txBody>
@@ -11265,7 +11265,7 @@
             <a:pPr algn="r"/>
             <a:r>
               <a:rPr lang="en-GB" sz="1200" dirty="0"/>
-              <a:t>0.59</a:t>
+              <a:t>0,59</a:t>
             </a:r>
           </a:p>
         </p:txBody>
@@ -11300,7 +11300,7 @@
           <a:p>
             <a:r>
               <a:rPr lang="en-GB" sz="1200" dirty="0"/>
-              <a:t>0.6</a:t>
+              <a:t>0,6</a:t>
             </a:r>
           </a:p>
         </p:txBody>
@@ -11437,7 +11437,7 @@
             <a:pPr algn="r"/>
             <a:r>
               <a:rPr lang="en-GB" sz="1200" dirty="0"/>
-              <a:t>2.74</a:t>
+              <a:t>2,74</a:t>
             </a:r>
           </a:p>
         </p:txBody>
@@ -11472,7 +11472,7 @@
           <a:p>
             <a:r>
               <a:rPr lang="en-GB" sz="1200" dirty="0"/>
-              <a:t>2.47</a:t>
+              <a:t>2,47</a:t>
             </a:r>
           </a:p>
         </p:txBody>
@@ -11609,7 +11609,7 @@
             <a:pPr algn="r"/>
             <a:r>
               <a:rPr lang="en-GB" sz="1200" dirty="0"/>
-              <a:t>4.98</a:t>
+              <a:t>4,98</a:t>
             </a:r>
           </a:p>
         </p:txBody>
@@ -11644,7 +11644,7 @@
           <a:p>
             <a:r>
               <a:rPr lang="en-GB" sz="1200" dirty="0"/>
-              <a:t>5.01</a:t>
+              <a:t>5,01</a:t>
             </a:r>
           </a:p>
         </p:txBody>
@@ -11781,7 +11781,7 @@
             <a:pPr algn="r"/>
             <a:r>
               <a:rPr lang="en-GB" sz="1200" dirty="0"/>
-              <a:t>0.045</a:t>
+              <a:t>0,045</a:t>
             </a:r>
           </a:p>
         </p:txBody>
@@ -11816,7 +11816,7 @@
           <a:p>
             <a:r>
               <a:rPr lang="en-GB" sz="1200" dirty="0"/>
-              <a:t>0.201</a:t>
+              <a:t>0,201</a:t>
             </a:r>
           </a:p>
         </p:txBody>
@@ -11953,7 +11953,7 @@
             <a:pPr algn="r"/>
             <a:r>
               <a:rPr lang="en-GB" sz="1200" dirty="0"/>
-              <a:t>0.863</a:t>
+              <a:t>0,863</a:t>
             </a:r>
           </a:p>
         </p:txBody>
@@ -11988,7 +11988,7 @@
           <a:p>
             <a:r>
               <a:rPr lang="en-GB" sz="1200" dirty="0"/>
-              <a:t>0.86</a:t>
+              <a:t>0,86</a:t>
             </a:r>
           </a:p>
         </p:txBody>
@@ -12125,7 +12125,7 @@
             <a:pPr algn="r"/>
             <a:r>
               <a:rPr lang="en-GB" sz="1200" dirty="0"/>
-              <a:t>0.71</a:t>
+              <a:t>0,71</a:t>
             </a:r>
           </a:p>
         </p:txBody>
@@ -12160,7 +12160,7 @@
           <a:p>
             <a:r>
               <a:rPr lang="en-GB" sz="1200" dirty="0"/>
-              <a:t>0.708</a:t>
+              <a:t>0,708</a:t>
             </a:r>
           </a:p>
         </p:txBody>
@@ -12297,7 +12297,7 @@
             <a:pPr algn="r"/>
             <a:r>
               <a:rPr lang="en-GB" sz="1200" dirty="0"/>
-              <a:t>0.4</a:t>
+              <a:t>0,4</a:t>
             </a:r>
           </a:p>
         </p:txBody>
@@ -12332,7 +12332,7 @@
           <a:p>
             <a:r>
               <a:rPr lang="en-GB" sz="1200" dirty="0"/>
-              <a:t>0.411</a:t>
+              <a:t>0,411</a:t>
             </a:r>
           </a:p>
         </p:txBody>
@@ -12469,7 +12469,7 @@
             <a:pPr algn="r"/>
             <a:r>
               <a:rPr lang="en-GB" sz="1200" dirty="0"/>
-              <a:t>0.805</a:t>
+              <a:t>0,805</a:t>
             </a:r>
           </a:p>
         </p:txBody>
@@ -12504,7 +12504,7 @@
           <a:p>
             <a:r>
               <a:rPr lang="en-GB" sz="1200" dirty="0"/>
-              <a:t>0.81</a:t>
+              <a:t>0,81</a:t>
             </a:r>
           </a:p>
         </p:txBody>
@@ -12641,7 +12641,7 @@
             <a:pPr algn="r"/>
             <a:r>
               <a:rPr lang="en-GB" sz="1200" dirty="0"/>
-              <a:t>0.065</a:t>
+              <a:t>0,065</a:t>
             </a:r>
           </a:p>
         </p:txBody>
@@ -12676,7 +12676,7 @@
           <a:p>
             <a:r>
               <a:rPr lang="en-GB" sz="1200" dirty="0"/>
-              <a:t>0.07</a:t>
+              <a:t>0,07</a:t>
             </a:r>
           </a:p>
         </p:txBody>
@@ -12812,7 +12812,7 @@
           <a:p>
             <a:r>
               <a:rPr lang="en-GB" sz="1200" dirty="0"/>
-              <a:t>0.261, 0.612, 0.216</a:t>
+              <a:t>0,261, 0,612, 0,216</a:t>
             </a:r>
           </a:p>
         </p:txBody>
@@ -13048,7 +13048,7 @@
           <a:p>
             <a:r>
               <a:rPr lang="en-GB" sz="1200" dirty="0"/>
-              <a:t>0.35, 0.503, 0.305, 0.053</a:t>
+              <a:t>0,35, 0,503, 0,305, 0,053</a:t>
             </a:r>
           </a:p>
         </p:txBody>
@@ -13123,7 +13123,7 @@
           <a:p>
             <a:r>
               <a:rPr lang="en-GB" sz="1200" dirty="0"/>
-              <a:t>0.2105, 0.521, 0.25, 0.125, 0.215 </a:t>
+              <a:t>0,2105, 0,521, 0,25, 0,125, 0,215 </a:t>
             </a:r>
           </a:p>
         </p:txBody>
@@ -13246,7 +13246,7 @@
             </a:r>
             <a:r>
               <a:rPr lang="en-GB" sz="1200" dirty="0"/>
-              <a:t>0.8</a:t>
+              <a:t>0,8</a:t>
             </a:r>
             <a:r>
               <a:rPr lang="ru-RU" sz="1200" dirty="0"/>
@@ -13254,7 +13254,7 @@
             </a:r>
             <a:r>
               <a:rPr lang="en-GB" sz="1200" dirty="0"/>
-              <a:t>0.482 </a:t>
+              <a:t>0,482 </a:t>
             </a:r>
             <a:r>
               <a:rPr lang="ru-RU" sz="1200" dirty="0"/>
@@ -13309,7 +13309,7 @@
             </a:r>
             <a:r>
               <a:rPr lang="en-GB" sz="1200" b="1" dirty="0"/>
-              <a:t>0.21</a:t>
+              <a:t>0,21</a:t>
             </a:r>
             <a:r>
               <a:rPr lang="ru-RU" sz="1200" b="1" dirty="0"/>
@@ -13317,7 +13317,7 @@
             </a:r>
             <a:r>
               <a:rPr lang="en-GB" sz="1200" b="1" dirty="0"/>
-              <a:t>0.459 </a:t>
+              <a:t>0,459 </a:t>
             </a:r>
             <a:r>
               <a:rPr lang="ru-RU" sz="1200" b="1" dirty="0"/>
@@ -13628,7 +13628,7 @@
             <a:pPr algn="r"/>
             <a:r>
               <a:rPr lang="en-GB" sz="1200" dirty="0"/>
-              <a:t>0.5</a:t>
+              <a:t>0,5</a:t>
             </a:r>
           </a:p>
         </p:txBody>
@@ -13663,7 +13663,7 @@
           <a:p>
             <a:r>
               <a:rPr lang="en-GB" sz="1200" dirty="0"/>
-              <a:t>0.2</a:t>
+              <a:t>0,2</a:t>
             </a:r>
           </a:p>
         </p:txBody>
@@ -13841,7 +13841,7 @@
             <a:pPr algn="r"/>
             <a:r>
               <a:rPr lang="en-GB" sz="1200" dirty="0"/>
-              <a:t>0.8</a:t>
+              <a:t>0,8</a:t>
             </a:r>
           </a:p>
         </p:txBody>
@@ -13876,7 +13876,7 @@
           <a:p>
             <a:r>
               <a:rPr lang="en-GB" sz="1200" dirty="0"/>
-              <a:t>0.7</a:t>
+              <a:t>0,7</a:t>
             </a:r>
           </a:p>
         </p:txBody>
@@ -14013,7 +14013,7 @@
             <a:pPr algn="r"/>
             <a:r>
               <a:rPr lang="en-GB" sz="1200" dirty="0"/>
-              <a:t>4.2</a:t>
+              <a:t>4,2</a:t>
             </a:r>
           </a:p>
         </p:txBody>
@@ -14048,7 +14048,7 @@
           <a:p>
             <a:r>
               <a:rPr lang="en-GB" sz="1200" dirty="0"/>
-              <a:t>3.9</a:t>
+              <a:t>3,9</a:t>
             </a:r>
           </a:p>
         </p:txBody>
@@ -14185,7 +14185,7 @@
             <a:pPr algn="r"/>
             <a:r>
               <a:rPr lang="en-GB" sz="1200" dirty="0"/>
-              <a:t>0.7</a:t>
+              <a:t>0,7</a:t>
             </a:r>
           </a:p>
         </p:txBody>
@@ -14220,7 +14220,7 @@
           <a:p>
             <a:r>
               <a:rPr lang="en-GB" sz="1200" dirty="0"/>
-              <a:t>0.9</a:t>
+              <a:t>0,9</a:t>
             </a:r>
           </a:p>
         </p:txBody>
@@ -14357,7 +14357,7 @@
             <a:pPr algn="r"/>
             <a:r>
               <a:rPr lang="en-GB" sz="1200" dirty="0"/>
-              <a:t>0.09</a:t>
+              <a:t>0,09</a:t>
             </a:r>
           </a:p>
         </p:txBody>
@@ -14392,7 +14392,7 @@
           <a:p>
             <a:r>
               <a:rPr lang="en-GB" sz="1200" dirty="0"/>
-              <a:t>0.6</a:t>
+              <a:t>0,6</a:t>
             </a:r>
           </a:p>
         </p:txBody>
@@ -14529,7 +14529,7 @@
             <a:pPr algn="r"/>
             <a:r>
               <a:rPr lang="en-GB" sz="1200" dirty="0"/>
-              <a:t>0.7</a:t>
+              <a:t>0,7</a:t>
             </a:r>
           </a:p>
         </p:txBody>
@@ -14564,7 +14564,7 @@
           <a:p>
             <a:r>
               <a:rPr lang="en-GB" sz="1200" dirty="0"/>
-              <a:t>0.49</a:t>
+              <a:t>0,49</a:t>
             </a:r>
           </a:p>
         </p:txBody>
@@ -14701,7 +14701,7 @@
             <a:pPr algn="r"/>
             <a:r>
               <a:rPr lang="en-GB" sz="1200" dirty="0"/>
-              <a:t>0.6</a:t>
+              <a:t>0,6</a:t>
             </a:r>
           </a:p>
         </p:txBody>
@@ -14736,7 +14736,7 @@
           <a:p>
             <a:r>
               <a:rPr lang="en-GB" sz="1200" dirty="0"/>
-              <a:t>0.71</a:t>
+              <a:t>0,71</a:t>
             </a:r>
           </a:p>
         </p:txBody>
@@ -14873,7 +14873,7 @@
             <a:pPr algn="r"/>
             <a:r>
               <a:rPr lang="en-GB" sz="1200" dirty="0"/>
-              <a:t>0.59</a:t>
+              <a:t>0,59</a:t>
             </a:r>
           </a:p>
         </p:txBody>
@@ -14908,7 +14908,7 @@
           <a:p>
             <a:r>
               <a:rPr lang="en-GB" sz="1200" dirty="0"/>
-              <a:t>0.6</a:t>
+              <a:t>0,6</a:t>
             </a:r>
           </a:p>
         </p:txBody>
@@ -15045,7 +15045,7 @@
             <a:pPr algn="r"/>
             <a:r>
               <a:rPr lang="en-GB" sz="1200" dirty="0"/>
-              <a:t>2.74</a:t>
+              <a:t>2,74</a:t>
             </a:r>
           </a:p>
         </p:txBody>
@@ -15080,7 +15080,7 @@
           <a:p>
             <a:r>
               <a:rPr lang="en-GB" sz="1200" dirty="0"/>
-              <a:t>2.47</a:t>
+              <a:t>2,47</a:t>
             </a:r>
           </a:p>
         </p:txBody>
@@ -15217,7 +15217,7 @@
             <a:pPr algn="r"/>
             <a:r>
               <a:rPr lang="en-GB" sz="1200" dirty="0"/>
-              <a:t>4.98</a:t>
+              <a:t>4,98</a:t>
             </a:r>
           </a:p>
         </p:txBody>
@@ -15252,7 +15252,7 @@
           <a:p>
             <a:r>
               <a:rPr lang="en-GB" sz="1200" dirty="0"/>
-              <a:t>5.01</a:t>
+              <a:t>5,01</a:t>
             </a:r>
           </a:p>
         </p:txBody>
@@ -15389,7 +15389,7 @@
             <a:pPr algn="r"/>
             <a:r>
               <a:rPr lang="en-GB" sz="1200" dirty="0"/>
-              <a:t>0.045</a:t>
+              <a:t>0,045</a:t>
             </a:r>
           </a:p>
         </p:txBody>
@@ -15424,7 +15424,7 @@
           <a:p>
             <a:r>
               <a:rPr lang="en-GB" sz="1200" dirty="0"/>
-              <a:t>0.201</a:t>
+              <a:t>0,201</a:t>
             </a:r>
           </a:p>
         </p:txBody>
@@ -15561,7 +15561,7 @@
             <a:pPr algn="r"/>
             <a:r>
               <a:rPr lang="en-GB" sz="1200" dirty="0"/>
-              <a:t>0.863</a:t>
+              <a:t>0,863</a:t>
             </a:r>
           </a:p>
         </p:txBody>
@@ -15596,7 +15596,7 @@
           <a:p>
             <a:r>
               <a:rPr lang="en-GB" sz="1200" dirty="0"/>
-              <a:t>0.86</a:t>
+              <a:t>0,86</a:t>
             </a:r>
           </a:p>
         </p:txBody>
@@ -15733,7 +15733,7 @@
             <a:pPr algn="r"/>
             <a:r>
               <a:rPr lang="en-GB" sz="1200" dirty="0"/>
-              <a:t>0.71</a:t>
+              <a:t>0,71</a:t>
             </a:r>
           </a:p>
         </p:txBody>
@@ -15768,7 +15768,7 @@
           <a:p>
             <a:r>
               <a:rPr lang="en-GB" sz="1200" dirty="0"/>
-              <a:t>0.708</a:t>
+              <a:t>0,708</a:t>
             </a:r>
           </a:p>
         </p:txBody>
@@ -15905,7 +15905,7 @@
             <a:pPr algn="r"/>
             <a:r>
               <a:rPr lang="en-GB" sz="1200" dirty="0"/>
-              <a:t>0.4</a:t>
+              <a:t>0,4</a:t>
             </a:r>
           </a:p>
         </p:txBody>
@@ -15940,7 +15940,7 @@
           <a:p>
             <a:r>
               <a:rPr lang="en-GB" sz="1200" dirty="0"/>
-              <a:t>0.411</a:t>
+              <a:t>0,411</a:t>
             </a:r>
           </a:p>
         </p:txBody>
@@ -16077,7 +16077,7 @@
             <a:pPr algn="r"/>
             <a:r>
               <a:rPr lang="en-GB" sz="1200" dirty="0"/>
-              <a:t>0.805</a:t>
+              <a:t>0,805</a:t>
             </a:r>
           </a:p>
         </p:txBody>
@@ -16112,7 +16112,7 @@
           <a:p>
             <a:r>
               <a:rPr lang="en-GB" sz="1200" dirty="0"/>
-              <a:t>0.81</a:t>
+              <a:t>0,81</a:t>
             </a:r>
           </a:p>
         </p:txBody>
@@ -16249,7 +16249,7 @@
             <a:pPr algn="r"/>
             <a:r>
               <a:rPr lang="en-GB" sz="1200" dirty="0"/>
-              <a:t>0.065</a:t>
+              <a:t>0,065</a:t>
             </a:r>
           </a:p>
         </p:txBody>
@@ -16284,7 +16284,7 @@
           <a:p>
             <a:r>
               <a:rPr lang="en-GB" sz="1200" dirty="0"/>
-              <a:t>0.07</a:t>
+              <a:t>0,07</a:t>
             </a:r>
           </a:p>
         </p:txBody>
@@ -16420,7 +16420,7 @@
           <a:p>
             <a:r>
               <a:rPr lang="en-GB" sz="1200" dirty="0"/>
-              <a:t>0.261, 0.612, 0.216</a:t>
+              <a:t>0,261, 0,612, 0,216</a:t>
             </a:r>
           </a:p>
         </p:txBody>
@@ -16656,7 +16656,7 @@
           <a:p>
             <a:r>
               <a:rPr lang="en-GB" sz="1200" dirty="0"/>
-              <a:t>0.35, 0.503, 0.305, 0.053</a:t>
+              <a:t>0,35, 0,503, 0,305, 0,053</a:t>
             </a:r>
           </a:p>
         </p:txBody>
@@ -16731,7 +16731,7 @@
           <a:p>
             <a:r>
               <a:rPr lang="en-GB" sz="1200" dirty="0"/>
-              <a:t>0.2105, 0.521, 0.25, 0.125, 0.215 </a:t>
+              <a:t>0,2105, 0,521, 0,25, 0,125, 0,215 </a:t>
             </a:r>
           </a:p>
         </p:txBody>
@@ -16854,7 +16854,7 @@
             </a:r>
             <a:r>
               <a:rPr lang="en-GB" sz="1200" dirty="0"/>
-              <a:t>0.8</a:t>
+              <a:t>0,8</a:t>
             </a:r>
             <a:r>
               <a:rPr lang="ru-RU" sz="1200" dirty="0"/>
@@ -16862,7 +16862,7 @@
             </a:r>
             <a:r>
               <a:rPr lang="en-GB" sz="1200" dirty="0"/>
-              <a:t>0.482 </a:t>
+              <a:t>0,482 </a:t>
             </a:r>
             <a:r>
               <a:rPr lang="ru-RU" sz="1200" dirty="0"/>
@@ -16917,7 +16917,7 @@
             </a:r>
             <a:r>
               <a:rPr lang="en-GB" sz="1200" b="1" dirty="0"/>
-              <a:t>0.21</a:t>
+              <a:t>0,21</a:t>
             </a:r>
             <a:r>
               <a:rPr lang="ru-RU" sz="1200" b="1" dirty="0"/>
@@ -16925,7 +16925,7 @@
             </a:r>
             <a:r>
               <a:rPr lang="en-GB" sz="1200" b="1" dirty="0"/>
-              <a:t>0.459 </a:t>
+              <a:t>0,459 </a:t>
             </a:r>
             <a:r>
               <a:rPr lang="ru-RU" sz="1200" b="1" dirty="0"/>
